--- a/public/fun/pack/pptx/weddingpro/결혼식프리미엄_37_러브스토리중심_시나몬로즈.pptx
+++ b/public/fun/pack/pptx/weddingpro/결혼식프리미엄_37_러브스토리중심_시나몬로즈.pptx
@@ -113,12 +113,12 @@
   <p:extLst>
     <p:ext uri="{521415D9-36F7-43E2-AB2F-B90AF26B5E84}">
       <p14:sectionLst xmlns:p14="http://schemas.microsoft.com/office/powerpoint/2010/main">
-        <p14:section name="시작" id="{836FB274-9FF5-454E-8655-0E7DCE6D625F}">
+        <p14:section name="시작" id="{E555A6EA-A78D-4A95-B0AB-623A419FC631}">
           <p14:sldIdLst>
             <p14:sldId id="256"/>
           </p14:sldIdLst>
         </p14:section>
-        <p14:section name="본문" id="{CCA58C9B-4F00-494F-BCC0-468A2A5CF4A4}">
+        <p14:section name="본문" id="{E60717FE-BA8F-4688-BBAB-0967656313F9}">
           <p14:sldIdLst>
             <p14:sldId id="257"/>
             <p14:sldId id="258"/>
@@ -127,7 +127,7 @@
             <p14:sldId id="261"/>
           </p14:sldIdLst>
         </p14:section>
-        <p14:section name="마무리" id="{E20B002C-64C5-4645-92C9-6AA109645106}">
+        <p14:section name="마무리" id="{EFF92555-F9A9-4DD6-A291-C3244B47B264}">
           <p14:sldIdLst>
             <p14:sldId id="262"/>
           </p14:sldIdLst>
@@ -1480,7 +1480,7 @@
             </a:lvl1pPr>
           </a:lstStyle>
           <a:p>
-            <a:fld id="{04AD1EAD-705B-4CD8-9C1E-F8D11A9D9EF4}" type="slidenum">
+            <a:fld id="{C1D8C0C9-D06F-4E4D-B13D-035866A43595}" type="slidenum">
               <a:rPr lang="en-US"/>
               <a:t>‹#›</a:t>
             </a:fld>
@@ -2093,7 +2093,7 @@
             </a:lvl1pPr>
           </a:lstStyle>
           <a:p>
-            <a:fld id="{F57F07D7-E040-4A4F-A5A1-A99A0232D057}" type="slidenum">
+            <a:fld id="{3C039C9E-D4F5-4673-8EDC-ECCE004FE454}" type="slidenum">
               <a:rPr lang="en-US"/>
               <a:t>‹#›</a:t>
             </a:fld>
@@ -2771,7 +2771,7 @@
             </a:lvl1pPr>
           </a:lstStyle>
           <a:p>
-            <a:fld id="{E03CA866-6AF8-4ACF-99C7-476214839553}" type="slidenum">
+            <a:fld id="{B94E70E0-CC58-499D-A311-191139E44D1E}" type="slidenum">
               <a:rPr lang="en-US"/>
               <a:t>‹#›</a:t>
             </a:fld>
@@ -3612,7 +3612,7 @@
           <a:p>
             <a:r>
               <a:rPr lang="ko-KR"/>
-              <a:t>함께 보낸 계절을 사진으로 모았습니다</a:t>
+              <a:t>함께 보낸 시간을 사진으로 모았습니다</a:t>
             </a:r>
           </a:p>
         </p:txBody>
@@ -3640,7 +3640,7 @@
           <a:p>
             <a:r>
               <a:rPr lang="ko-KR"/>
-              <a:t>0000. 00. 00 · 예식장 이름</a:t>
+              <a:t>날짜 입력 · 예식장 이름</a:t>
             </a:r>
           </a:p>
         </p:txBody>
@@ -3863,7 +3863,7 @@
           <a:bodyPr/>
           <a:lstStyle/>
           <a:p>
-            <a:fld id="{DDF1E5C4-9375-4970-ADBC-5D2CC46FB9E4}" type="slidenum">
+            <a:fld id="{6C3007B8-0511-4203-8962-ED28C920FEC8}" type="slidenum">
               <a:rPr lang="en-US"/>
               <a:t>‹#›</a:t>
             </a:fld>
@@ -4307,7 +4307,7 @@
           <a:bodyPr/>
           <a:lstStyle/>
           <a:p>
-            <a:fld id="{20B9072B-7A5D-4CE9-932B-713F5AF0B8E2}" type="slidenum">
+            <a:fld id="{FFA7B91E-0F54-4743-AEA8-EE7E2E131764}" type="slidenum">
               <a:rPr lang="en-US"/>
               <a:t>‹#›</a:t>
             </a:fld>
@@ -5149,7 +5149,7 @@
           <a:bodyPr/>
           <a:lstStyle/>
           <a:p>
-            <a:fld id="{12CC38D2-FCFB-46CC-BFD0-065D701E64E3}" type="slidenum">
+            <a:fld id="{91A8E086-1810-41AB-8291-C5FE7401AC25}" type="slidenum">
               <a:rPr lang="en-US"/>
               <a:t>‹#›</a:t>
             </a:fld>
@@ -6759,7 +6759,7 @@
           <a:bodyPr/>
           <a:lstStyle/>
           <a:p>
-            <a:fld id="{8A696807-47E3-4C18-B4A7-4B845609FB72}" type="slidenum">
+            <a:fld id="{4C8FBE84-DA3E-4454-A04C-54E59D159471}" type="slidenum">
               <a:rPr lang="en-US"/>
               <a:t>‹#›</a:t>
             </a:fld>
@@ -6847,7 +6847,7 @@
           <a:bodyPr/>
           <a:lstStyle/>
           <a:p>
-            <a:fld id="{178C7309-5CE2-4D53-B097-3B346D2AEAA2}" type="slidenum">
+            <a:fld id="{9D99178E-97E4-4867-8970-869269BAADD1}" type="slidenum">
               <a:rPr lang="en-US"/>
               <a:t>‹#›</a:t>
             </a:fld>
